--- a/ИСР 1.2/ИСР 1.2 защита УгаринНА.pptx
+++ b/ИСР 1.2/ИСР 1.2 защита УгаринНА.pptx
@@ -5,7 +5,7 @@
     <p:sldMasterId id="2147483648" r:id="rId1"/>
   </p:sldMasterIdLst>
   <p:notesMasterIdLst>
-    <p:notesMasterId r:id="rId16"/>
+    <p:notesMasterId r:id="rId15"/>
   </p:notesMasterIdLst>
   <p:sldIdLst>
     <p:sldId id="256" r:id="rId2"/>
@@ -15,13 +15,12 @@
     <p:sldId id="260" r:id="rId6"/>
     <p:sldId id="261" r:id="rId7"/>
     <p:sldId id="262" r:id="rId8"/>
-    <p:sldId id="263" r:id="rId9"/>
-    <p:sldId id="264" r:id="rId10"/>
-    <p:sldId id="265" r:id="rId11"/>
-    <p:sldId id="266" r:id="rId12"/>
-    <p:sldId id="267" r:id="rId13"/>
-    <p:sldId id="268" r:id="rId14"/>
-    <p:sldId id="269" r:id="rId15"/>
+    <p:sldId id="264" r:id="rId9"/>
+    <p:sldId id="265" r:id="rId10"/>
+    <p:sldId id="266" r:id="rId11"/>
+    <p:sldId id="267" r:id="rId12"/>
+    <p:sldId id="268" r:id="rId13"/>
+    <p:sldId id="269" r:id="rId14"/>
   </p:sldIdLst>
   <p:sldSz cx="12192000" cy="6858000"/>
   <p:notesSz cx="6858000" cy="9144000"/>
@@ -210,7 +209,7 @@
           <a:p>
             <a:fld id="{90BF191B-5A99-4B32-80DF-5F4B9C1B5E0C}" type="datetimeFigureOut">
               <a:rPr lang="ru-RU" smtClean="0"/>
-              <a:t>21.05.2026</a:t>
+              <a:t>23.05.2026</a:t>
             </a:fld>
             <a:endParaRPr lang="ru-RU"/>
           </a:p>
@@ -609,7 +608,7 @@
           <a:p>
             <a:fld id="{8BE903EC-8753-49A8-A8BC-5D03D13B088B}" type="datetimeFigureOut">
               <a:rPr lang="ru-RU" smtClean="0"/>
-              <a:t>21.05.2026</a:t>
+              <a:t>23.05.2026</a:t>
             </a:fld>
             <a:endParaRPr lang="ru-RU"/>
           </a:p>
@@ -779,7 +778,7 @@
           <a:p>
             <a:fld id="{8BE903EC-8753-49A8-A8BC-5D03D13B088B}" type="datetimeFigureOut">
               <a:rPr lang="ru-RU" smtClean="0"/>
-              <a:t>21.05.2026</a:t>
+              <a:t>23.05.2026</a:t>
             </a:fld>
             <a:endParaRPr lang="ru-RU"/>
           </a:p>
@@ -959,7 +958,7 @@
           <a:p>
             <a:fld id="{8BE903EC-8753-49A8-A8BC-5D03D13B088B}" type="datetimeFigureOut">
               <a:rPr lang="ru-RU" smtClean="0"/>
-              <a:t>21.05.2026</a:t>
+              <a:t>23.05.2026</a:t>
             </a:fld>
             <a:endParaRPr lang="ru-RU"/>
           </a:p>
@@ -1129,7 +1128,7 @@
           <a:p>
             <a:fld id="{8BE903EC-8753-49A8-A8BC-5D03D13B088B}" type="datetimeFigureOut">
               <a:rPr lang="ru-RU" smtClean="0"/>
-              <a:t>21.05.2026</a:t>
+              <a:t>23.05.2026</a:t>
             </a:fld>
             <a:endParaRPr lang="ru-RU"/>
           </a:p>
@@ -1375,7 +1374,7 @@
           <a:p>
             <a:fld id="{8BE903EC-8753-49A8-A8BC-5D03D13B088B}" type="datetimeFigureOut">
               <a:rPr lang="ru-RU" smtClean="0"/>
-              <a:t>21.05.2026</a:t>
+              <a:t>23.05.2026</a:t>
             </a:fld>
             <a:endParaRPr lang="ru-RU"/>
           </a:p>
@@ -1607,7 +1606,7 @@
           <a:p>
             <a:fld id="{8BE903EC-8753-49A8-A8BC-5D03D13B088B}" type="datetimeFigureOut">
               <a:rPr lang="ru-RU" smtClean="0"/>
-              <a:t>21.05.2026</a:t>
+              <a:t>23.05.2026</a:t>
             </a:fld>
             <a:endParaRPr lang="ru-RU"/>
           </a:p>
@@ -1974,7 +1973,7 @@
           <a:p>
             <a:fld id="{8BE903EC-8753-49A8-A8BC-5D03D13B088B}" type="datetimeFigureOut">
               <a:rPr lang="ru-RU" smtClean="0"/>
-              <a:t>21.05.2026</a:t>
+              <a:t>23.05.2026</a:t>
             </a:fld>
             <a:endParaRPr lang="ru-RU"/>
           </a:p>
@@ -2092,7 +2091,7 @@
           <a:p>
             <a:fld id="{8BE903EC-8753-49A8-A8BC-5D03D13B088B}" type="datetimeFigureOut">
               <a:rPr lang="ru-RU" smtClean="0"/>
-              <a:t>21.05.2026</a:t>
+              <a:t>23.05.2026</a:t>
             </a:fld>
             <a:endParaRPr lang="ru-RU"/>
           </a:p>
@@ -2187,7 +2186,7 @@
           <a:p>
             <a:fld id="{8BE903EC-8753-49A8-A8BC-5D03D13B088B}" type="datetimeFigureOut">
               <a:rPr lang="ru-RU" smtClean="0"/>
-              <a:t>21.05.2026</a:t>
+              <a:t>23.05.2026</a:t>
             </a:fld>
             <a:endParaRPr lang="ru-RU"/>
           </a:p>
@@ -2464,7 +2463,7 @@
           <a:p>
             <a:fld id="{8BE903EC-8753-49A8-A8BC-5D03D13B088B}" type="datetimeFigureOut">
               <a:rPr lang="ru-RU" smtClean="0"/>
-              <a:t>21.05.2026</a:t>
+              <a:t>23.05.2026</a:t>
             </a:fld>
             <a:endParaRPr lang="ru-RU"/>
           </a:p>
@@ -2717,7 +2716,7 @@
           <a:p>
             <a:fld id="{8BE903EC-8753-49A8-A8BC-5D03D13B088B}" type="datetimeFigureOut">
               <a:rPr lang="ru-RU" smtClean="0"/>
-              <a:t>21.05.2026</a:t>
+              <a:t>23.05.2026</a:t>
             </a:fld>
             <a:endParaRPr lang="ru-RU"/>
           </a:p>
@@ -2930,7 +2929,7 @@
           <a:p>
             <a:fld id="{8BE903EC-8753-49A8-A8BC-5D03D13B088B}" type="datetimeFigureOut">
               <a:rPr lang="ru-RU" smtClean="0"/>
-              <a:t>21.05.2026</a:t>
+              <a:t>23.05.2026</a:t>
             </a:fld>
             <a:endParaRPr lang="ru-RU"/>
           </a:p>
@@ -3696,92 +3695,6 @@
 </file>
 
 <file path=ppt/slides/slide10.xml><?xml version="1.0" encoding="utf-8"?>
-<p:sld xmlns:a="http://schemas.openxmlformats.org/drawingml/2006/main" xmlns:r="http://schemas.openxmlformats.org/officeDocument/2006/relationships" xmlns:p="http://schemas.openxmlformats.org/presentationml/2006/main">
-  <p:cSld>
-    <p:spTree>
-      <p:nvGrpSpPr>
-        <p:cNvPr id="1" name=""/>
-        <p:cNvGrpSpPr/>
-        <p:nvPr/>
-      </p:nvGrpSpPr>
-      <p:grpSpPr>
-        <a:xfrm>
-          <a:off x="0" y="0"/>
-          <a:ext cx="0" cy="0"/>
-          <a:chOff x="0" y="0"/>
-          <a:chExt cx="0" cy="0"/>
-        </a:xfrm>
-      </p:grpSpPr>
-      <p:sp>
-        <p:nvSpPr>
-          <p:cNvPr id="2" name="Заголовок 1"/>
-          <p:cNvSpPr>
-            <a:spLocks noGrp="1"/>
-          </p:cNvSpPr>
-          <p:nvPr>
-            <p:ph type="title"/>
-          </p:nvPr>
-        </p:nvSpPr>
-        <p:spPr/>
-        <p:txBody>
-          <a:bodyPr/>
-          <a:lstStyle/>
-          <a:p>
-            <a:pPr algn="ctr"/>
-            <a:r>
-              <a:rPr lang="ru-RU" dirty="0" smtClean="0">
-                <a:latin typeface="Times New Roman" panose="02020603050405020304" pitchFamily="18" charset="0"/>
-                <a:cs typeface="Times New Roman" panose="02020603050405020304" pitchFamily="18" charset="0"/>
-              </a:rPr>
-              <a:t>Главное меню</a:t>
-            </a:r>
-            <a:endParaRPr lang="ru-RU" dirty="0">
-              <a:latin typeface="Times New Roman" panose="02020603050405020304" pitchFamily="18" charset="0"/>
-              <a:cs typeface="Times New Roman" panose="02020603050405020304" pitchFamily="18" charset="0"/>
-            </a:endParaRPr>
-          </a:p>
-        </p:txBody>
-      </p:sp>
-      <p:pic>
-        <p:nvPicPr>
-          <p:cNvPr id="4" name="Объект 3"/>
-          <p:cNvPicPr>
-            <a:picLocks noGrp="1" noChangeAspect="1"/>
-          </p:cNvPicPr>
-          <p:nvPr>
-            <p:ph idx="1"/>
-          </p:nvPr>
-        </p:nvPicPr>
-        <p:blipFill>
-          <a:blip r:embed="rId2"/>
-          <a:stretch>
-            <a:fillRect/>
-          </a:stretch>
-        </p:blipFill>
-        <p:spPr>
-          <a:xfrm>
-            <a:off x="1713005" y="1608342"/>
-            <a:ext cx="8765989" cy="4682199"/>
-          </a:xfrm>
-          <a:prstGeom prst="rect">
-            <a:avLst/>
-          </a:prstGeom>
-        </p:spPr>
-      </p:pic>
-    </p:spTree>
-    <p:extLst>
-      <p:ext uri="{BB962C8B-B14F-4D97-AF65-F5344CB8AC3E}">
-        <p14:creationId xmlns:p14="http://schemas.microsoft.com/office/powerpoint/2010/main" val="3135372765"/>
-      </p:ext>
-    </p:extLst>
-  </p:cSld>
-  <p:clrMapOvr>
-    <a:masterClrMapping/>
-  </p:clrMapOvr>
-</p:sld>
-</file>
-
-<file path=ppt/slides/slide11.xml><?xml version="1.0" encoding="utf-8"?>
 <p:sld xmlns:a="http://schemas.openxmlformats.org/drawingml/2006/main" xmlns:r="http://schemas.openxmlformats.org/officeDocument/2006/relationships" xmlns:p="http://schemas.openxmlformats.org/presentationml/2006/main">
   <p:cSld>
     <p:spTree>
@@ -4465,7 +4378,7 @@
 </p:sld>
 </file>
 
-<file path=ppt/slides/slide12.xml><?xml version="1.0" encoding="utf-8"?>
+<file path=ppt/slides/slide11.xml><?xml version="1.0" encoding="utf-8"?>
 <p:sld xmlns:a="http://schemas.openxmlformats.org/drawingml/2006/main" xmlns:r="http://schemas.openxmlformats.org/officeDocument/2006/relationships" xmlns:p="http://schemas.openxmlformats.org/presentationml/2006/main">
   <p:cSld>
     <p:spTree>
@@ -4968,7 +4881,7 @@
 </p:sld>
 </file>
 
-<file path=ppt/slides/slide13.xml><?xml version="1.0" encoding="utf-8"?>
+<file path=ppt/slides/slide12.xml><?xml version="1.0" encoding="utf-8"?>
 <p:sld xmlns:a="http://schemas.openxmlformats.org/drawingml/2006/main" xmlns:r="http://schemas.openxmlformats.org/officeDocument/2006/relationships" xmlns:p="http://schemas.openxmlformats.org/presentationml/2006/main">
   <p:cSld>
     <p:spTree>
@@ -5182,7 +5095,7 @@
 </p:sld>
 </file>
 
-<file path=ppt/slides/slide14.xml><?xml version="1.0" encoding="utf-8"?>
+<file path=ppt/slides/slide13.xml><?xml version="1.0" encoding="utf-8"?>
 <p:sld xmlns:a="http://schemas.openxmlformats.org/drawingml/2006/main" xmlns:r="http://schemas.openxmlformats.org/officeDocument/2006/relationships" xmlns:p="http://schemas.openxmlformats.org/presentationml/2006/main">
   <p:cSld>
     <p:spTree>
@@ -6040,14 +5953,7 @@
                 <a:latin typeface="Times New Roman" panose="02020603050405020304" pitchFamily="18" charset="0"/>
                 <a:cs typeface="Times New Roman" panose="02020603050405020304" pitchFamily="18" charset="0"/>
               </a:rPr>
-              <a:t>Все программы находятся в одной экосистеме </a:t>
-            </a:r>
-            <a:r>
-              <a:rPr lang="ru-RU" sz="2400" dirty="0" smtClean="0">
-                <a:latin typeface="Times New Roman" panose="02020603050405020304" pitchFamily="18" charset="0"/>
-                <a:cs typeface="Times New Roman" panose="02020603050405020304" pitchFamily="18" charset="0"/>
-              </a:rPr>
-              <a:t>от </a:t>
+              <a:t>Все программы находятся в одной экосистеме от </a:t>
             </a:r>
             <a:r>
               <a:rPr lang="ru-RU" sz="2400" dirty="0" err="1">
@@ -7704,6 +7610,57 @@
       </p:grpSpPr>
       <p:sp>
         <p:nvSpPr>
+          <p:cNvPr id="2" name="Заголовок 1"/>
+          <p:cNvSpPr>
+            <a:spLocks noGrp="1"/>
+          </p:cNvSpPr>
+          <p:nvPr>
+            <p:ph type="title"/>
+          </p:nvPr>
+        </p:nvSpPr>
+        <p:spPr>
+          <a:xfrm>
+            <a:off x="117695" y="53552"/>
+            <a:ext cx="11959628" cy="920903"/>
+          </a:xfrm>
+        </p:spPr>
+        <p:txBody>
+          <a:bodyPr>
+            <a:normAutofit/>
+          </a:bodyPr>
+          <a:lstStyle/>
+          <a:p>
+            <a:pPr algn="ctr"/>
+            <a:r>
+              <a:rPr lang="ru-RU" altLang="ru-RU" dirty="0" smtClean="0">
+                <a:latin typeface="Times New Roman" panose="02020603050405020304" pitchFamily="18" charset="0"/>
+                <a:cs typeface="Times New Roman" panose="02020603050405020304" pitchFamily="18" charset="0"/>
+              </a:rPr>
+              <a:t>Самый сложный элемент </a:t>
+            </a:r>
+            <a:r>
+              <a:rPr lang="ru-RU" altLang="ru-RU" dirty="0">
+                <a:latin typeface="Times New Roman" panose="02020603050405020304" pitchFamily="18" charset="0"/>
+                <a:cs typeface="Times New Roman" panose="02020603050405020304" pitchFamily="18" charset="0"/>
+              </a:rPr>
+              <a:t>– окно «Новый приём</a:t>
+            </a:r>
+            <a:r>
+              <a:rPr lang="ru-RU" altLang="ru-RU" dirty="0" smtClean="0">
+                <a:latin typeface="Times New Roman" panose="02020603050405020304" pitchFamily="18" charset="0"/>
+                <a:cs typeface="Times New Roman" panose="02020603050405020304" pitchFamily="18" charset="0"/>
+              </a:rPr>
+              <a:t>»</a:t>
+            </a:r>
+            <a:endParaRPr lang="ru-RU" dirty="0">
+              <a:latin typeface="Times New Roman" panose="02020603050405020304" pitchFamily="18" charset="0"/>
+              <a:cs typeface="Times New Roman" panose="02020603050405020304" pitchFamily="18" charset="0"/>
+            </a:endParaRPr>
+          </a:p>
+        </p:txBody>
+      </p:sp>
+      <p:sp>
+        <p:nvSpPr>
           <p:cNvPr id="3" name="Объект 2"/>
           <p:cNvSpPr>
             <a:spLocks noGrp="1"/>
@@ -7712,10 +7669,103 @@
             <p:ph idx="1"/>
           </p:nvPr>
         </p:nvSpPr>
-        <p:spPr/>
+        <p:spPr>
+          <a:xfrm>
+            <a:off x="1" y="5499657"/>
+            <a:ext cx="12192000" cy="1222457"/>
+          </a:xfrm>
+        </p:spPr>
         <p:txBody>
           <a:bodyPr/>
           <a:lstStyle/>
+          <a:p>
+            <a:pPr marL="0" lvl="0" indent="0" algn="ctr" eaLnBrk="0" fontAlgn="base" hangingPunct="0">
+              <a:lnSpc>
+                <a:spcPct val="100000"/>
+              </a:lnSpc>
+              <a:spcBef>
+                <a:spcPct val="0"/>
+              </a:spcBef>
+              <a:spcAft>
+                <a:spcPct val="0"/>
+              </a:spcAft>
+              <a:buNone/>
+            </a:pPr>
+            <a:r>
+              <a:rPr lang="ru-RU" altLang="ru-RU" sz="2000" dirty="0">
+                <a:latin typeface="Times New Roman" panose="02020603050405020304" pitchFamily="18" charset="0"/>
+                <a:cs typeface="Times New Roman" panose="02020603050405020304" pitchFamily="18" charset="0"/>
+              </a:rPr>
+              <a:t>Ввод 2 символов → </a:t>
+            </a:r>
+            <a:r>
+              <a:rPr lang="ru-RU" altLang="ru-RU" sz="2000" dirty="0" smtClean="0">
+                <a:latin typeface="Times New Roman" panose="02020603050405020304" pitchFamily="18" charset="0"/>
+                <a:cs typeface="Times New Roman" panose="02020603050405020304" pitchFamily="18" charset="0"/>
+              </a:rPr>
+              <a:t>задержка </a:t>
+            </a:r>
+            <a:r>
+              <a:rPr lang="ru-RU" altLang="ru-RU" sz="2000" dirty="0">
+                <a:latin typeface="Times New Roman" panose="02020603050405020304" pitchFamily="18" charset="0"/>
+                <a:cs typeface="Times New Roman" panose="02020603050405020304" pitchFamily="18" charset="0"/>
+              </a:rPr>
+              <a:t>300 </a:t>
+            </a:r>
+            <a:r>
+              <a:rPr lang="ru-RU" altLang="ru-RU" sz="2000" dirty="0" err="1">
+                <a:latin typeface="Times New Roman" panose="02020603050405020304" pitchFamily="18" charset="0"/>
+                <a:cs typeface="Times New Roman" panose="02020603050405020304" pitchFamily="18" charset="0"/>
+              </a:rPr>
+              <a:t>мс</a:t>
+            </a:r>
+            <a:r>
+              <a:rPr lang="ru-RU" altLang="ru-RU" sz="2000" dirty="0">
+                <a:latin typeface="Times New Roman" panose="02020603050405020304" pitchFamily="18" charset="0"/>
+                <a:cs typeface="Times New Roman" panose="02020603050405020304" pitchFamily="18" charset="0"/>
+              </a:rPr>
+              <a:t> → </a:t>
+            </a:r>
+            <a:r>
+              <a:rPr lang="ru-RU" altLang="ru-RU" sz="2000" dirty="0" smtClean="0">
+                <a:latin typeface="Times New Roman" panose="02020603050405020304" pitchFamily="18" charset="0"/>
+                <a:cs typeface="Times New Roman" panose="02020603050405020304" pitchFamily="18" charset="0"/>
+              </a:rPr>
+              <a:t>асинхронный </a:t>
+            </a:r>
+            <a:r>
+              <a:rPr lang="ru-RU" altLang="ru-RU" sz="2000" dirty="0">
+                <a:latin typeface="Times New Roman" panose="02020603050405020304" pitchFamily="18" charset="0"/>
+                <a:cs typeface="Times New Roman" panose="02020603050405020304" pitchFamily="18" charset="0"/>
+              </a:rPr>
+              <a:t>запрос → </a:t>
+            </a:r>
+            <a:r>
+              <a:rPr lang="ru-RU" altLang="ru-RU" sz="2000" dirty="0" smtClean="0">
+                <a:latin typeface="Times New Roman" panose="02020603050405020304" pitchFamily="18" charset="0"/>
+                <a:cs typeface="Times New Roman" panose="02020603050405020304" pitchFamily="18" charset="0"/>
+              </a:rPr>
+              <a:t>кэш записывается на </a:t>
+            </a:r>
+            <a:r>
+              <a:rPr lang="ru-RU" altLang="ru-RU" sz="2000" dirty="0">
+                <a:latin typeface="Times New Roman" panose="02020603050405020304" pitchFamily="18" charset="0"/>
+                <a:cs typeface="Times New Roman" panose="02020603050405020304" pitchFamily="18" charset="0"/>
+              </a:rPr>
+              <a:t>5 минут </a:t>
+            </a:r>
+            <a:r>
+              <a:rPr lang="ru-RU" altLang="ru-RU" sz="2000" dirty="0" smtClean="0">
+                <a:latin typeface="Times New Roman" panose="02020603050405020304" pitchFamily="18" charset="0"/>
+                <a:cs typeface="Times New Roman" panose="02020603050405020304" pitchFamily="18" charset="0"/>
+              </a:rPr>
+              <a:t>→ результат</a:t>
+            </a:r>
+            <a:endParaRPr lang="ru-RU" altLang="ru-RU" sz="2000" dirty="0">
+              <a:latin typeface="Times New Roman" panose="02020603050405020304" pitchFamily="18" charset="0"/>
+              <a:cs typeface="Times New Roman" panose="02020603050405020304" pitchFamily="18" charset="0"/>
+            </a:endParaRPr>
+          </a:p>
           <a:p>
             <a:pPr marL="0" lvl="0" indent="0" eaLnBrk="0" fontAlgn="base" hangingPunct="0">
               <a:lnSpc>
@@ -7729,617 +7779,6 @@
               </a:spcAft>
               <a:buNone/>
             </a:pPr>
-            <a:r>
-              <a:rPr lang="ru-RU" altLang="ru-RU" sz="2000" dirty="0" smtClean="0"/>
-              <a:t>Что </a:t>
-            </a:r>
-            <a:r>
-              <a:rPr lang="ru-RU" altLang="ru-RU" sz="2000" dirty="0"/>
-              <a:t>на слайде:</a:t>
-            </a:r>
-          </a:p>
-          <a:p>
-            <a:pPr marL="0" lvl="0" indent="0" eaLnBrk="0" fontAlgn="base" hangingPunct="0">
-              <a:lnSpc>
-                <a:spcPct val="100000"/>
-              </a:lnSpc>
-              <a:spcBef>
-                <a:spcPct val="0"/>
-              </a:spcBef>
-              <a:spcAft>
-                <a:spcPct val="0"/>
-              </a:spcAft>
-              <a:buFontTx/>
-              <a:buChar char="•"/>
-            </a:pPr>
-            <a:r>
-              <a:rPr lang="ru-RU" altLang="ru-RU" sz="2000" dirty="0"/>
-              <a:t>Скриншот окна </a:t>
-            </a:r>
-            <a:r>
-              <a:rPr lang="ru-RU" altLang="ru-RU" sz="2000" dirty="0" err="1"/>
-              <a:t>NewJoin</a:t>
-            </a:r>
-            <a:r>
-              <a:rPr lang="ru-RU" altLang="ru-RU" sz="2000" dirty="0"/>
-              <a:t> (можно вырезать основную часть с поиском и списками шифров)</a:t>
-            </a:r>
-          </a:p>
-          <a:p>
-            <a:pPr marL="0" lvl="0" indent="0" eaLnBrk="0" fontAlgn="base" hangingPunct="0">
-              <a:lnSpc>
-                <a:spcPct val="100000"/>
-              </a:lnSpc>
-              <a:spcBef>
-                <a:spcPct val="0"/>
-              </a:spcBef>
-              <a:spcAft>
-                <a:spcPct val="0"/>
-              </a:spcAft>
-              <a:buFontTx/>
-              <a:buChar char="•"/>
-            </a:pPr>
-            <a:r>
-              <a:rPr lang="ru-RU" altLang="ru-RU" sz="2000" dirty="0"/>
-              <a:t>Выделенные блоки:</a:t>
-            </a:r>
-          </a:p>
-          <a:p>
-            <a:pPr marL="457200" lvl="1" indent="0" eaLnBrk="0" fontAlgn="base" hangingPunct="0">
-              <a:lnSpc>
-                <a:spcPct val="100000"/>
-              </a:lnSpc>
-              <a:spcBef>
-                <a:spcPct val="0"/>
-              </a:spcBef>
-              <a:spcAft>
-                <a:spcPct val="0"/>
-              </a:spcAft>
-              <a:buFontTx/>
-              <a:buChar char="•"/>
-            </a:pPr>
-            <a:r>
-              <a:rPr lang="ru-RU" altLang="ru-RU" sz="1000" dirty="0"/>
-              <a:t>Поле поиска пациента (</a:t>
-            </a:r>
-            <a:r>
-              <a:rPr lang="ru-RU" altLang="ru-RU" sz="1000" dirty="0" err="1"/>
-              <a:t>ComboBox</a:t>
-            </a:r>
-            <a:r>
-              <a:rPr lang="ru-RU" altLang="ru-RU" sz="1000" dirty="0"/>
-              <a:t> с </a:t>
-            </a:r>
-            <a:r>
-              <a:rPr lang="ru-RU" altLang="ru-RU" sz="1000" dirty="0" err="1"/>
-              <a:t>автодополнением</a:t>
-            </a:r>
-            <a:r>
-              <a:rPr lang="ru-RU" altLang="ru-RU" sz="1000" dirty="0"/>
-              <a:t>)</a:t>
-            </a:r>
-          </a:p>
-          <a:p>
-            <a:pPr marL="457200" lvl="1" indent="0" eaLnBrk="0" fontAlgn="base" hangingPunct="0">
-              <a:lnSpc>
-                <a:spcPct val="100000"/>
-              </a:lnSpc>
-              <a:spcBef>
-                <a:spcPct val="0"/>
-              </a:spcBef>
-              <a:spcAft>
-                <a:spcPct val="0"/>
-              </a:spcAft>
-              <a:buFontTx/>
-              <a:buChar char="•"/>
-            </a:pPr>
-            <a:r>
-              <a:rPr lang="ru-RU" altLang="ru-RU" sz="1000" dirty="0"/>
-              <a:t>Три списка шифров (логопед, психиатр, заключения) с множественным выбором</a:t>
-            </a:r>
-          </a:p>
-          <a:p>
-            <a:pPr marL="457200" lvl="1" indent="0" eaLnBrk="0" fontAlgn="base" hangingPunct="0">
-              <a:lnSpc>
-                <a:spcPct val="100000"/>
-              </a:lnSpc>
-              <a:spcBef>
-                <a:spcPct val="0"/>
-              </a:spcBef>
-              <a:spcAft>
-                <a:spcPct val="0"/>
-              </a:spcAft>
-              <a:buFontTx/>
-              <a:buChar char="•"/>
-            </a:pPr>
-            <a:r>
-              <a:rPr lang="ru-RU" altLang="ru-RU" sz="1000" dirty="0"/>
-              <a:t>Кнопка «Открыть карточку» (переход в NewCard2)</a:t>
-            </a:r>
-          </a:p>
-          <a:p>
-            <a:pPr marL="0" lvl="0" indent="0" eaLnBrk="0" fontAlgn="base" hangingPunct="0">
-              <a:lnSpc>
-                <a:spcPct val="100000"/>
-              </a:lnSpc>
-              <a:spcBef>
-                <a:spcPct val="0"/>
-              </a:spcBef>
-              <a:spcAft>
-                <a:spcPct val="0"/>
-              </a:spcAft>
-              <a:buFontTx/>
-              <a:buChar char="•"/>
-            </a:pPr>
-            <a:r>
-              <a:rPr lang="ru-RU" altLang="ru-RU" sz="2000" dirty="0"/>
-              <a:t>Схема оптимизаций:</a:t>
-            </a:r>
-          </a:p>
-          <a:p>
-            <a:pPr marL="0" lvl="0" indent="0" eaLnBrk="0" fontAlgn="base" hangingPunct="0">
-              <a:lnSpc>
-                <a:spcPct val="100000"/>
-              </a:lnSpc>
-              <a:spcBef>
-                <a:spcPct val="0"/>
-              </a:spcBef>
-              <a:spcAft>
-                <a:spcPct val="0"/>
-              </a:spcAft>
-              <a:buNone/>
-            </a:pPr>
-            <a:r>
-              <a:rPr lang="ru-RU" altLang="ru-RU" sz="2000" dirty="0" err="1"/>
-              <a:t>text</a:t>
-            </a:r>
-            <a:endParaRPr lang="ru-RU" altLang="ru-RU" sz="2000" dirty="0"/>
-          </a:p>
-          <a:p>
-            <a:pPr marL="0" lvl="0" indent="0" eaLnBrk="0" fontAlgn="base" hangingPunct="0">
-              <a:lnSpc>
-                <a:spcPct val="100000"/>
-              </a:lnSpc>
-              <a:spcBef>
-                <a:spcPct val="0"/>
-              </a:spcBef>
-              <a:spcAft>
-                <a:spcPct val="0"/>
-              </a:spcAft>
-              <a:buNone/>
-            </a:pPr>
-            <a:r>
-              <a:rPr lang="ru-RU" altLang="ru-RU" sz="2000" dirty="0"/>
-              <a:t>Ввод 2 символов → задержка 300 </a:t>
-            </a:r>
-            <a:r>
-              <a:rPr lang="ru-RU" altLang="ru-RU" sz="2000" dirty="0" err="1"/>
-              <a:t>мс</a:t>
-            </a:r>
-            <a:r>
-              <a:rPr lang="ru-RU" altLang="ru-RU" sz="2000" dirty="0"/>
-              <a:t> → асинхронный запрос → кэш 5 минут → результат</a:t>
-            </a:r>
-          </a:p>
-          <a:p>
-            <a:pPr marL="0" lvl="0" indent="0" eaLnBrk="0" fontAlgn="base" hangingPunct="0">
-              <a:lnSpc>
-                <a:spcPct val="100000"/>
-              </a:lnSpc>
-              <a:spcBef>
-                <a:spcPct val="0"/>
-              </a:spcBef>
-              <a:spcAft>
-                <a:spcPct val="0"/>
-              </a:spcAft>
-              <a:buFontTx/>
-              <a:buChar char="•"/>
-            </a:pPr>
-            <a:r>
-              <a:rPr lang="ru-RU" altLang="ru-RU" sz="2000" dirty="0"/>
-              <a:t>Цифра: «Более 30 000 приёмов — поиск &lt; 0.5 секунды»</a:t>
-            </a:r>
-          </a:p>
-          <a:p>
-            <a:endParaRPr lang="ru-RU" dirty="0"/>
-          </a:p>
-        </p:txBody>
-      </p:sp>
-      <p:sp>
-        <p:nvSpPr>
-          <p:cNvPr id="4" name="Rectangle 1"/>
-          <p:cNvSpPr>
-            <a:spLocks noGrp="1" noChangeArrowheads="1"/>
-          </p:cNvSpPr>
-          <p:nvPr>
-            <p:ph type="title"/>
-          </p:nvPr>
-        </p:nvSpPr>
-        <p:spPr bwMode="auto">
-          <a:xfrm>
-            <a:off x="838200" y="720131"/>
-            <a:ext cx="6568593" cy="615553"/>
-          </a:xfrm>
-          <a:prstGeom prst="rect">
-            <a:avLst/>
-          </a:prstGeom>
-          <a:solidFill>
-            <a:srgbClr val="151517"/>
-          </a:solidFill>
-          <a:ln w="9525">
-            <a:noFill/>
-            <a:miter lim="800000"/>
-            <a:headEnd/>
-            <a:tailEnd/>
-          </a:ln>
-          <a:effectLst/>
-          <a:extLst>
-            <a:ext uri="{AF507438-7753-43E0-B8FC-AC1667EBCBE1}">
-              <a14:hiddenEffects xmlns:a14="http://schemas.microsoft.com/office/drawing/2010/main">
-                <a:effectLst>
-                  <a:outerShdw dist="35921" dir="2700000" algn="ctr" rotWithShape="0">
-                    <a:schemeClr val="bg2"/>
-                  </a:outerShdw>
-                </a:effectLst>
-              </a14:hiddenEffects>
-            </a:ext>
-          </a:extLst>
-        </p:spPr>
-        <p:txBody>
-          <a:bodyPr vert="horz" wrap="none" lIns="0" tIns="0" rIns="0" bIns="0" numCol="1" anchor="ctr" anchorCtr="0" compatLnSpc="1">
-            <a:prstTxWarp prst="textNoShape">
-              <a:avLst/>
-            </a:prstTxWarp>
-            <a:spAutoFit/>
-          </a:bodyPr>
-          <a:lstStyle>
-            <a:lvl1pPr eaLnBrk="0" fontAlgn="base" hangingPunct="0">
-              <a:spcBef>
-                <a:spcPct val="0"/>
-              </a:spcBef>
-              <a:spcAft>
-                <a:spcPct val="0"/>
-              </a:spcAft>
-              <a:defRPr>
-                <a:solidFill>
-                  <a:schemeClr val="tx1"/>
-                </a:solidFill>
-                <a:latin typeface="Arial" panose="020B0604020202020204" pitchFamily="34" charset="0"/>
-              </a:defRPr>
-            </a:lvl1pPr>
-            <a:lvl2pPr eaLnBrk="0" fontAlgn="base" hangingPunct="0">
-              <a:spcBef>
-                <a:spcPct val="0"/>
-              </a:spcBef>
-              <a:spcAft>
-                <a:spcPct val="0"/>
-              </a:spcAft>
-              <a:defRPr>
-                <a:solidFill>
-                  <a:schemeClr val="tx1"/>
-                </a:solidFill>
-                <a:latin typeface="Arial" panose="020B0604020202020204" pitchFamily="34" charset="0"/>
-              </a:defRPr>
-            </a:lvl2pPr>
-            <a:lvl3pPr eaLnBrk="0" fontAlgn="base" hangingPunct="0">
-              <a:spcBef>
-                <a:spcPct val="0"/>
-              </a:spcBef>
-              <a:spcAft>
-                <a:spcPct val="0"/>
-              </a:spcAft>
-              <a:defRPr>
-                <a:solidFill>
-                  <a:schemeClr val="tx1"/>
-                </a:solidFill>
-                <a:latin typeface="Arial" panose="020B0604020202020204" pitchFamily="34" charset="0"/>
-              </a:defRPr>
-            </a:lvl3pPr>
-            <a:lvl4pPr eaLnBrk="0" fontAlgn="base" hangingPunct="0">
-              <a:spcBef>
-                <a:spcPct val="0"/>
-              </a:spcBef>
-              <a:spcAft>
-                <a:spcPct val="0"/>
-              </a:spcAft>
-              <a:defRPr>
-                <a:solidFill>
-                  <a:schemeClr val="tx1"/>
-                </a:solidFill>
-                <a:latin typeface="Arial" panose="020B0604020202020204" pitchFamily="34" charset="0"/>
-              </a:defRPr>
-            </a:lvl4pPr>
-            <a:lvl5pPr eaLnBrk="0" fontAlgn="base" hangingPunct="0">
-              <a:spcBef>
-                <a:spcPct val="0"/>
-              </a:spcBef>
-              <a:spcAft>
-                <a:spcPct val="0"/>
-              </a:spcAft>
-              <a:defRPr>
-                <a:solidFill>
-                  <a:schemeClr val="tx1"/>
-                </a:solidFill>
-                <a:latin typeface="Arial" panose="020B0604020202020204" pitchFamily="34" charset="0"/>
-              </a:defRPr>
-            </a:lvl5pPr>
-            <a:lvl6pPr eaLnBrk="0" fontAlgn="base" hangingPunct="0">
-              <a:spcBef>
-                <a:spcPct val="0"/>
-              </a:spcBef>
-              <a:spcAft>
-                <a:spcPct val="0"/>
-              </a:spcAft>
-              <a:defRPr>
-                <a:solidFill>
-                  <a:schemeClr val="tx1"/>
-                </a:solidFill>
-                <a:latin typeface="Arial" panose="020B0604020202020204" pitchFamily="34" charset="0"/>
-              </a:defRPr>
-            </a:lvl6pPr>
-            <a:lvl7pPr eaLnBrk="0" fontAlgn="base" hangingPunct="0">
-              <a:spcBef>
-                <a:spcPct val="0"/>
-              </a:spcBef>
-              <a:spcAft>
-                <a:spcPct val="0"/>
-              </a:spcAft>
-              <a:defRPr>
-                <a:solidFill>
-                  <a:schemeClr val="tx1"/>
-                </a:solidFill>
-                <a:latin typeface="Arial" panose="020B0604020202020204" pitchFamily="34" charset="0"/>
-              </a:defRPr>
-            </a:lvl7pPr>
-            <a:lvl8pPr eaLnBrk="0" fontAlgn="base" hangingPunct="0">
-              <a:spcBef>
-                <a:spcPct val="0"/>
-              </a:spcBef>
-              <a:spcAft>
-                <a:spcPct val="0"/>
-              </a:spcAft>
-              <a:defRPr>
-                <a:solidFill>
-                  <a:schemeClr val="tx1"/>
-                </a:solidFill>
-                <a:latin typeface="Arial" panose="020B0604020202020204" pitchFamily="34" charset="0"/>
-              </a:defRPr>
-            </a:lvl8pPr>
-            <a:lvl9pPr eaLnBrk="0" fontAlgn="base" hangingPunct="0">
-              <a:spcBef>
-                <a:spcPct val="0"/>
-              </a:spcBef>
-              <a:spcAft>
-                <a:spcPct val="0"/>
-              </a:spcAft>
-              <a:defRPr>
-                <a:solidFill>
-                  <a:schemeClr val="tx1"/>
-                </a:solidFill>
-                <a:latin typeface="Arial" panose="020B0604020202020204" pitchFamily="34" charset="0"/>
-              </a:defRPr>
-            </a:lvl9pPr>
-          </a:lstStyle>
-          <a:p>
-            <a:pPr>
-              <a:lnSpc>
-                <a:spcPct val="100000"/>
-              </a:lnSpc>
-            </a:pPr>
-            <a:r>
-              <a:rPr lang="ru-RU" altLang="ru-RU" sz="2000" dirty="0"/>
-              <a:t>Ключевая реализация – окно «Новый приём» (прорыв)</a:t>
-            </a:r>
-            <a:br>
-              <a:rPr lang="ru-RU" altLang="ru-RU" sz="2000" dirty="0"/>
-            </a:br>
-            <a:endParaRPr lang="ru-RU" altLang="ru-RU" sz="2000" dirty="0">
-              <a:latin typeface="+mn-lt"/>
-            </a:endParaRPr>
-          </a:p>
-        </p:txBody>
-      </p:sp>
-    </p:spTree>
-    <p:extLst>
-      <p:ext uri="{BB962C8B-B14F-4D97-AF65-F5344CB8AC3E}">
-        <p14:creationId xmlns:p14="http://schemas.microsoft.com/office/powerpoint/2010/main" val="2640216277"/>
-      </p:ext>
-    </p:extLst>
-  </p:cSld>
-  <p:clrMapOvr>
-    <a:masterClrMapping/>
-  </p:clrMapOvr>
-</p:sld>
-</file>
-
-<file path=ppt/slides/slide9.xml><?xml version="1.0" encoding="utf-8"?>
-<p:sld xmlns:a="http://schemas.openxmlformats.org/drawingml/2006/main" xmlns:r="http://schemas.openxmlformats.org/officeDocument/2006/relationships" xmlns:p="http://schemas.openxmlformats.org/presentationml/2006/main">
-  <p:cSld>
-    <p:spTree>
-      <p:nvGrpSpPr>
-        <p:cNvPr id="1" name=""/>
-        <p:cNvGrpSpPr/>
-        <p:nvPr/>
-      </p:nvGrpSpPr>
-      <p:grpSpPr>
-        <a:xfrm>
-          <a:off x="0" y="0"/>
-          <a:ext cx="0" cy="0"/>
-          <a:chOff x="0" y="0"/>
-          <a:chExt cx="0" cy="0"/>
-        </a:xfrm>
-      </p:grpSpPr>
-      <p:sp>
-        <p:nvSpPr>
-          <p:cNvPr id="2" name="Заголовок 1"/>
-          <p:cNvSpPr>
-            <a:spLocks noGrp="1"/>
-          </p:cNvSpPr>
-          <p:nvPr>
-            <p:ph type="title"/>
-          </p:nvPr>
-        </p:nvSpPr>
-        <p:spPr>
-          <a:xfrm>
-            <a:off x="117695" y="53552"/>
-            <a:ext cx="11959628" cy="920903"/>
-          </a:xfrm>
-        </p:spPr>
-        <p:txBody>
-          <a:bodyPr>
-            <a:normAutofit/>
-          </a:bodyPr>
-          <a:lstStyle/>
-          <a:p>
-            <a:pPr algn="ctr"/>
-            <a:r>
-              <a:rPr lang="ru-RU" altLang="ru-RU" dirty="0" smtClean="0">
-                <a:latin typeface="Times New Roman" panose="02020603050405020304" pitchFamily="18" charset="0"/>
-                <a:cs typeface="Times New Roman" panose="02020603050405020304" pitchFamily="18" charset="0"/>
-              </a:rPr>
-              <a:t>Самый сложный элемент </a:t>
-            </a:r>
-            <a:r>
-              <a:rPr lang="ru-RU" altLang="ru-RU" dirty="0">
-                <a:latin typeface="Times New Roman" panose="02020603050405020304" pitchFamily="18" charset="0"/>
-                <a:cs typeface="Times New Roman" panose="02020603050405020304" pitchFamily="18" charset="0"/>
-              </a:rPr>
-              <a:t>– окно «Новый приём</a:t>
-            </a:r>
-            <a:r>
-              <a:rPr lang="ru-RU" altLang="ru-RU" dirty="0" smtClean="0">
-                <a:latin typeface="Times New Roman" panose="02020603050405020304" pitchFamily="18" charset="0"/>
-                <a:cs typeface="Times New Roman" panose="02020603050405020304" pitchFamily="18" charset="0"/>
-              </a:rPr>
-              <a:t>»</a:t>
-            </a:r>
-            <a:endParaRPr lang="ru-RU" dirty="0">
-              <a:latin typeface="Times New Roman" panose="02020603050405020304" pitchFamily="18" charset="0"/>
-              <a:cs typeface="Times New Roman" panose="02020603050405020304" pitchFamily="18" charset="0"/>
-            </a:endParaRPr>
-          </a:p>
-        </p:txBody>
-      </p:sp>
-      <p:sp>
-        <p:nvSpPr>
-          <p:cNvPr id="3" name="Объект 2"/>
-          <p:cNvSpPr>
-            <a:spLocks noGrp="1"/>
-          </p:cNvSpPr>
-          <p:nvPr>
-            <p:ph idx="1"/>
-          </p:nvPr>
-        </p:nvSpPr>
-        <p:spPr>
-          <a:xfrm>
-            <a:off x="1" y="5499657"/>
-            <a:ext cx="12192000" cy="1222457"/>
-          </a:xfrm>
-        </p:spPr>
-        <p:txBody>
-          <a:bodyPr/>
-          <a:lstStyle/>
-          <a:p>
-            <a:pPr marL="0" lvl="0" indent="0" algn="ctr" eaLnBrk="0" fontAlgn="base" hangingPunct="0">
-              <a:lnSpc>
-                <a:spcPct val="100000"/>
-              </a:lnSpc>
-              <a:spcBef>
-                <a:spcPct val="0"/>
-              </a:spcBef>
-              <a:spcAft>
-                <a:spcPct val="0"/>
-              </a:spcAft>
-              <a:buNone/>
-            </a:pPr>
-            <a:r>
-              <a:rPr lang="ru-RU" altLang="ru-RU" sz="2000" dirty="0">
-                <a:latin typeface="Times New Roman" panose="02020603050405020304" pitchFamily="18" charset="0"/>
-                <a:cs typeface="Times New Roman" panose="02020603050405020304" pitchFamily="18" charset="0"/>
-              </a:rPr>
-              <a:t>Ввод 2 символов → </a:t>
-            </a:r>
-            <a:r>
-              <a:rPr lang="ru-RU" altLang="ru-RU" sz="2000" dirty="0" smtClean="0">
-                <a:latin typeface="Times New Roman" panose="02020603050405020304" pitchFamily="18" charset="0"/>
-                <a:cs typeface="Times New Roman" panose="02020603050405020304" pitchFamily="18" charset="0"/>
-              </a:rPr>
-              <a:t>задержка </a:t>
-            </a:r>
-            <a:r>
-              <a:rPr lang="ru-RU" altLang="ru-RU" sz="2000" dirty="0">
-                <a:latin typeface="Times New Roman" panose="02020603050405020304" pitchFamily="18" charset="0"/>
-                <a:cs typeface="Times New Roman" panose="02020603050405020304" pitchFamily="18" charset="0"/>
-              </a:rPr>
-              <a:t>300 </a:t>
-            </a:r>
-            <a:r>
-              <a:rPr lang="ru-RU" altLang="ru-RU" sz="2000" dirty="0" err="1">
-                <a:latin typeface="Times New Roman" panose="02020603050405020304" pitchFamily="18" charset="0"/>
-                <a:cs typeface="Times New Roman" panose="02020603050405020304" pitchFamily="18" charset="0"/>
-              </a:rPr>
-              <a:t>мс</a:t>
-            </a:r>
-            <a:r>
-              <a:rPr lang="ru-RU" altLang="ru-RU" sz="2000" dirty="0">
-                <a:latin typeface="Times New Roman" panose="02020603050405020304" pitchFamily="18" charset="0"/>
-                <a:cs typeface="Times New Roman" panose="02020603050405020304" pitchFamily="18" charset="0"/>
-              </a:rPr>
-              <a:t> → </a:t>
-            </a:r>
-            <a:r>
-              <a:rPr lang="ru-RU" altLang="ru-RU" sz="2000" dirty="0" smtClean="0">
-                <a:latin typeface="Times New Roman" panose="02020603050405020304" pitchFamily="18" charset="0"/>
-                <a:cs typeface="Times New Roman" panose="02020603050405020304" pitchFamily="18" charset="0"/>
-              </a:rPr>
-              <a:t>асинхронный </a:t>
-            </a:r>
-            <a:r>
-              <a:rPr lang="ru-RU" altLang="ru-RU" sz="2000" dirty="0">
-                <a:latin typeface="Times New Roman" panose="02020603050405020304" pitchFamily="18" charset="0"/>
-                <a:cs typeface="Times New Roman" panose="02020603050405020304" pitchFamily="18" charset="0"/>
-              </a:rPr>
-              <a:t>запрос → </a:t>
-            </a:r>
-            <a:r>
-              <a:rPr lang="ru-RU" altLang="ru-RU" sz="2000" dirty="0" smtClean="0">
-                <a:latin typeface="Times New Roman" panose="02020603050405020304" pitchFamily="18" charset="0"/>
-                <a:cs typeface="Times New Roman" panose="02020603050405020304" pitchFamily="18" charset="0"/>
-              </a:rPr>
-              <a:t>кэш записывается на </a:t>
-            </a:r>
-            <a:r>
-              <a:rPr lang="ru-RU" altLang="ru-RU" sz="2000" dirty="0">
-                <a:latin typeface="Times New Roman" panose="02020603050405020304" pitchFamily="18" charset="0"/>
-                <a:cs typeface="Times New Roman" panose="02020603050405020304" pitchFamily="18" charset="0"/>
-              </a:rPr>
-              <a:t>5 минут </a:t>
-            </a:r>
-            <a:r>
-              <a:rPr lang="ru-RU" altLang="ru-RU" sz="2000" dirty="0" smtClean="0">
-                <a:latin typeface="Times New Roman" panose="02020603050405020304" pitchFamily="18" charset="0"/>
-                <a:cs typeface="Times New Roman" panose="02020603050405020304" pitchFamily="18" charset="0"/>
-              </a:rPr>
-              <a:t>→ результат</a:t>
-            </a:r>
-            <a:endParaRPr lang="ru-RU" altLang="ru-RU" sz="2000" dirty="0">
-              <a:latin typeface="Times New Roman" panose="02020603050405020304" pitchFamily="18" charset="0"/>
-              <a:cs typeface="Times New Roman" panose="02020603050405020304" pitchFamily="18" charset="0"/>
-            </a:endParaRPr>
-          </a:p>
-          <a:p>
-            <a:pPr marL="0" lvl="0" indent="0" eaLnBrk="0" fontAlgn="base" hangingPunct="0">
-              <a:lnSpc>
-                <a:spcPct val="100000"/>
-              </a:lnSpc>
-              <a:spcBef>
-                <a:spcPct val="0"/>
-              </a:spcBef>
-              <a:spcAft>
-                <a:spcPct val="0"/>
-              </a:spcAft>
-              <a:buNone/>
-            </a:pPr>
             <a:endParaRPr lang="ru-RU" altLang="ru-RU" dirty="0">
               <a:latin typeface="Times New Roman" panose="02020603050405020304" pitchFamily="18" charset="0"/>
               <a:cs typeface="Times New Roman" panose="02020603050405020304" pitchFamily="18" charset="0"/>
@@ -8383,10 +7822,6 @@
               </a:rPr>
               <a:t>«Более 30 000 приёмов — поиск &lt; 0.5 секунды»</a:t>
             </a:r>
-            <a:endParaRPr lang="ru-RU" altLang="ru-RU" sz="2400" u="sng" dirty="0">
-              <a:latin typeface="Times New Roman" panose="02020603050405020304" pitchFamily="18" charset="0"/>
-              <a:cs typeface="Times New Roman" panose="02020603050405020304" pitchFamily="18" charset="0"/>
-            </a:endParaRPr>
           </a:p>
         </p:txBody>
       </p:sp>
@@ -8418,6 +7853,92 @@
     <p:extLst>
       <p:ext uri="{BB962C8B-B14F-4D97-AF65-F5344CB8AC3E}">
         <p14:creationId xmlns:p14="http://schemas.microsoft.com/office/powerpoint/2010/main" val="37352367"/>
+      </p:ext>
+    </p:extLst>
+  </p:cSld>
+  <p:clrMapOvr>
+    <a:masterClrMapping/>
+  </p:clrMapOvr>
+</p:sld>
+</file>
+
+<file path=ppt/slides/slide9.xml><?xml version="1.0" encoding="utf-8"?>
+<p:sld xmlns:a="http://schemas.openxmlformats.org/drawingml/2006/main" xmlns:r="http://schemas.openxmlformats.org/officeDocument/2006/relationships" xmlns:p="http://schemas.openxmlformats.org/presentationml/2006/main">
+  <p:cSld>
+    <p:spTree>
+      <p:nvGrpSpPr>
+        <p:cNvPr id="1" name=""/>
+        <p:cNvGrpSpPr/>
+        <p:nvPr/>
+      </p:nvGrpSpPr>
+      <p:grpSpPr>
+        <a:xfrm>
+          <a:off x="0" y="0"/>
+          <a:ext cx="0" cy="0"/>
+          <a:chOff x="0" y="0"/>
+          <a:chExt cx="0" cy="0"/>
+        </a:xfrm>
+      </p:grpSpPr>
+      <p:sp>
+        <p:nvSpPr>
+          <p:cNvPr id="2" name="Заголовок 1"/>
+          <p:cNvSpPr>
+            <a:spLocks noGrp="1"/>
+          </p:cNvSpPr>
+          <p:nvPr>
+            <p:ph type="title"/>
+          </p:nvPr>
+        </p:nvSpPr>
+        <p:spPr/>
+        <p:txBody>
+          <a:bodyPr/>
+          <a:lstStyle/>
+          <a:p>
+            <a:pPr algn="ctr"/>
+            <a:r>
+              <a:rPr lang="ru-RU" dirty="0" smtClean="0">
+                <a:latin typeface="Times New Roman" panose="02020603050405020304" pitchFamily="18" charset="0"/>
+                <a:cs typeface="Times New Roman" panose="02020603050405020304" pitchFamily="18" charset="0"/>
+              </a:rPr>
+              <a:t>Главное меню</a:t>
+            </a:r>
+            <a:endParaRPr lang="ru-RU" dirty="0">
+              <a:latin typeface="Times New Roman" panose="02020603050405020304" pitchFamily="18" charset="0"/>
+              <a:cs typeface="Times New Roman" panose="02020603050405020304" pitchFamily="18" charset="0"/>
+            </a:endParaRPr>
+          </a:p>
+        </p:txBody>
+      </p:sp>
+      <p:pic>
+        <p:nvPicPr>
+          <p:cNvPr id="4" name="Объект 3"/>
+          <p:cNvPicPr>
+            <a:picLocks noGrp="1" noChangeAspect="1"/>
+          </p:cNvPicPr>
+          <p:nvPr>
+            <p:ph idx="1"/>
+          </p:nvPr>
+        </p:nvPicPr>
+        <p:blipFill>
+          <a:blip r:embed="rId2"/>
+          <a:stretch>
+            <a:fillRect/>
+          </a:stretch>
+        </p:blipFill>
+        <p:spPr>
+          <a:xfrm>
+            <a:off x="1713005" y="1608342"/>
+            <a:ext cx="8765989" cy="4682199"/>
+          </a:xfrm>
+          <a:prstGeom prst="rect">
+            <a:avLst/>
+          </a:prstGeom>
+        </p:spPr>
+      </p:pic>
+    </p:spTree>
+    <p:extLst>
+      <p:ext uri="{BB962C8B-B14F-4D97-AF65-F5344CB8AC3E}">
+        <p14:creationId xmlns:p14="http://schemas.microsoft.com/office/powerpoint/2010/main" val="3135372765"/>
       </p:ext>
     </p:extLst>
   </p:cSld>
